--- a/cursos/recursos/el-mapa-de-los-finales/20-peon-de-torre-y-vancura.pptx
+++ b/cursos/recursos/el-mapa-de-los-finales/20-peon-de-torre-y-vancura.pptx
@@ -4630,7 +4630,7 @@
                 </a:solidFill>
                 <a:latin typeface="Calibri"/>
               </a:rPr>
-              <a:t>Alcanzá la posición de Vancura contra el motor desde tres posiciones iniciales distintas.</a:t>
+              <a:t>Alcanza la posición de Vancura contra el motor desde tres posiciones iniciales distintas.</a:t>
             </a:r>
           </a:p>
           <a:p>
@@ -4701,7 +4701,7 @@
                 </a:solidFill>
                 <a:latin typeface="Calibri"/>
               </a:rPr>
-              <a:t>•  Recorré cada línea principal hasta entender el porqué de cada jugada.</a:t>
+              <a:t>•  Recorre cada línea principal hasta entender el porqué de cada jugada.</a:t>
             </a:r>
           </a:p>
           <a:p>
@@ -4717,7 +4717,7 @@
                 </a:solidFill>
                 <a:latin typeface="Calibri"/>
               </a:rPr>
-              <a:t>•  Practicá primero las posiciones clave, después las demás.</a:t>
+              <a:t>•  Practica primero las posiciones clave, después las demás.</a:t>
             </a:r>
           </a:p>
           <a:p>
@@ -4733,7 +4733,7 @@
                 </a:solidFill>
                 <a:latin typeface="Calibri"/>
               </a:rPr>
-              <a:t>•  Anotá las reglas de cada final con tus palabras.</a:t>
+              <a:t>•  Anota las reglas de cada final con tus palabras.</a:t>
             </a:r>
           </a:p>
         </p:txBody>
